--- a/1_experiment/figures/All_figures.pptx
+++ b/1_experiment/figures/All_figures.pptx
@@ -198,7 +198,7 @@
           <a:p>
             <a:fld id="{D93E7C88-AD06-0B46-A913-FBB4EDA557A7}" type="datetimeFigureOut">
               <a:rPr lang="en-GB" smtClean="0"/>
-              <a:t>03/08/2026</a:t>
+              <a:t>04/08/2026</a:t>
             </a:fld>
             <a:endParaRPr lang="en-GB"/>
           </a:p>
@@ -845,7 +845,7 @@
           <a:p>
             <a:fld id="{6AABF641-5FF5-D94A-B89F-40D3DD45CFB8}" type="datetimeFigureOut">
               <a:rPr lang="en-GB" smtClean="0"/>
-              <a:t>03/08/2026</a:t>
+              <a:t>04/08/2026</a:t>
             </a:fld>
             <a:endParaRPr lang="en-GB"/>
           </a:p>
@@ -1045,7 +1045,7 @@
           <a:p>
             <a:fld id="{6AABF641-5FF5-D94A-B89F-40D3DD45CFB8}" type="datetimeFigureOut">
               <a:rPr lang="en-GB" smtClean="0"/>
-              <a:t>03/08/2026</a:t>
+              <a:t>04/08/2026</a:t>
             </a:fld>
             <a:endParaRPr lang="en-GB"/>
           </a:p>
@@ -1255,7 +1255,7 @@
           <a:p>
             <a:fld id="{6AABF641-5FF5-D94A-B89F-40D3DD45CFB8}" type="datetimeFigureOut">
               <a:rPr lang="en-GB" smtClean="0"/>
-              <a:t>03/08/2026</a:t>
+              <a:t>04/08/2026</a:t>
             </a:fld>
             <a:endParaRPr lang="en-GB"/>
           </a:p>
@@ -1455,7 +1455,7 @@
           <a:p>
             <a:fld id="{6AABF641-5FF5-D94A-B89F-40D3DD45CFB8}" type="datetimeFigureOut">
               <a:rPr lang="en-GB" smtClean="0"/>
-              <a:t>03/08/2026</a:t>
+              <a:t>04/08/2026</a:t>
             </a:fld>
             <a:endParaRPr lang="en-GB"/>
           </a:p>
@@ -1731,7 +1731,7 @@
           <a:p>
             <a:fld id="{6AABF641-5FF5-D94A-B89F-40D3DD45CFB8}" type="datetimeFigureOut">
               <a:rPr lang="en-GB" smtClean="0"/>
-              <a:t>03/08/2026</a:t>
+              <a:t>04/08/2026</a:t>
             </a:fld>
             <a:endParaRPr lang="en-GB"/>
           </a:p>
@@ -1999,7 +1999,7 @@
           <a:p>
             <a:fld id="{6AABF641-5FF5-D94A-B89F-40D3DD45CFB8}" type="datetimeFigureOut">
               <a:rPr lang="en-GB" smtClean="0"/>
-              <a:t>03/08/2026</a:t>
+              <a:t>04/08/2026</a:t>
             </a:fld>
             <a:endParaRPr lang="en-GB"/>
           </a:p>
@@ -2414,7 +2414,7 @@
           <a:p>
             <a:fld id="{6AABF641-5FF5-D94A-B89F-40D3DD45CFB8}" type="datetimeFigureOut">
               <a:rPr lang="en-GB" smtClean="0"/>
-              <a:t>03/08/2026</a:t>
+              <a:t>04/08/2026</a:t>
             </a:fld>
             <a:endParaRPr lang="en-GB"/>
           </a:p>
@@ -2556,7 +2556,7 @@
           <a:p>
             <a:fld id="{6AABF641-5FF5-D94A-B89F-40D3DD45CFB8}" type="datetimeFigureOut">
               <a:rPr lang="en-GB" smtClean="0"/>
-              <a:t>03/08/2026</a:t>
+              <a:t>04/08/2026</a:t>
             </a:fld>
             <a:endParaRPr lang="en-GB"/>
           </a:p>
@@ -2669,7 +2669,7 @@
           <a:p>
             <a:fld id="{6AABF641-5FF5-D94A-B89F-40D3DD45CFB8}" type="datetimeFigureOut">
               <a:rPr lang="en-GB" smtClean="0"/>
-              <a:t>03/08/2026</a:t>
+              <a:t>04/08/2026</a:t>
             </a:fld>
             <a:endParaRPr lang="en-GB"/>
           </a:p>
@@ -2982,7 +2982,7 @@
           <a:p>
             <a:fld id="{6AABF641-5FF5-D94A-B89F-40D3DD45CFB8}" type="datetimeFigureOut">
               <a:rPr lang="en-GB" smtClean="0"/>
-              <a:t>03/08/2026</a:t>
+              <a:t>04/08/2026</a:t>
             </a:fld>
             <a:endParaRPr lang="en-GB"/>
           </a:p>
@@ -3271,7 +3271,7 @@
           <a:p>
             <a:fld id="{6AABF641-5FF5-D94A-B89F-40D3DD45CFB8}" type="datetimeFigureOut">
               <a:rPr lang="en-GB" smtClean="0"/>
-              <a:t>03/08/2026</a:t>
+              <a:t>04/08/2026</a:t>
             </a:fld>
             <a:endParaRPr lang="en-GB"/>
           </a:p>
@@ -3514,7 +3514,7 @@
           <a:p>
             <a:fld id="{6AABF641-5FF5-D94A-B89F-40D3DD45CFB8}" type="datetimeFigureOut">
               <a:rPr lang="en-GB" smtClean="0"/>
-              <a:t>03/08/2026</a:t>
+              <a:t>04/08/2026</a:t>
             </a:fld>
             <a:endParaRPr lang="en-GB"/>
           </a:p>
